--- a/apps/resources/bundled_files/5-klass-butun-sandar-kobeytuu-boluu-sabak.pptx
+++ b/apps/resources/bundled_files/5-klass-butun-sandar-kobeytuu-boluu-sabak.pptx
@@ -5196,7 +5196,7 @@
                 </a:solidFill>
                 <a:latin typeface="PT Sans"/>
               </a:rPr>
-              <a:t>5-класс · Математика</a:t>
+              <a:t/>
             </a:r>
           </a:p>
         </p:txBody>
@@ -5688,7 +5688,7 @@
                 </a:solidFill>
                 <a:latin typeface="PT Sans"/>
               </a:rPr>
-              <a:t>5-класс ›</a:t>
+              <a:t/>
             </a:r>
           </a:p>
           <a:p>
@@ -6637,7 +6637,7 @@
                 </a:solidFill>
                 <a:latin typeface="PT Sans"/>
               </a:rPr>
-              <a:t>5-класс ›</a:t>
+              <a:t/>
             </a:r>
           </a:p>
           <a:p>
@@ -10557,7 +10557,7 @@
                 </a:solidFill>
                 <a:latin typeface="PT Sans"/>
               </a:rPr>
-              <a:t>5-класс ›</a:t>
+              <a:t/>
             </a:r>
           </a:p>
           <a:p>
@@ -14021,7 +14021,7 @@
                 </a:solidFill>
                 <a:latin typeface="PT Sans"/>
               </a:rPr>
-              <a:t>5-класс ›</a:t>
+              <a:t/>
             </a:r>
           </a:p>
           <a:p>
@@ -15351,7 +15351,7 @@
                 </a:solidFill>
                 <a:latin typeface="PT Sans"/>
               </a:rPr>
-              <a:t>5-класс ›</a:t>
+              <a:t/>
             </a:r>
           </a:p>
           <a:p>
@@ -16063,7 +16063,7 @@
                 </a:solidFill>
                 <a:latin typeface="PT Sans"/>
               </a:rPr>
-              <a:t>5-класс ›</a:t>
+              <a:t/>
             </a:r>
           </a:p>
           <a:p>
@@ -16736,7 +16736,7 @@
                 </a:solidFill>
                 <a:latin typeface="PT Sans"/>
               </a:rPr>
-              <a:t>5-класс ›</a:t>
+              <a:t/>
             </a:r>
           </a:p>
           <a:p>
@@ -18402,7 +18402,7 @@
                 </a:solidFill>
                 <a:latin typeface="PT Sans"/>
               </a:rPr>
-              <a:t>5-класс ›</a:t>
+              <a:t/>
             </a:r>
           </a:p>
           <a:p>
@@ -19486,7 +19486,7 @@
                 </a:solidFill>
                 <a:latin typeface="PT Sans"/>
               </a:rPr>
-              <a:t>5-класс ›</a:t>
+              <a:t/>
             </a:r>
           </a:p>
           <a:p>
@@ -21016,7 +21016,7 @@
                 </a:solidFill>
                 <a:latin typeface="PT Sans"/>
               </a:rPr>
-              <a:t>5-класс ›</a:t>
+              <a:t/>
             </a:r>
           </a:p>
           <a:p>
@@ -23198,7 +23198,7 @@
                 </a:solidFill>
                 <a:latin typeface="PT Sans"/>
               </a:rPr>
-              <a:t>5-класс ›</a:t>
+              <a:t/>
             </a:r>
           </a:p>
           <a:p>
@@ -24475,7 +24475,7 @@
                 </a:solidFill>
                 <a:latin typeface="PT Sans"/>
               </a:rPr>
-              <a:t>5-класс ›</a:t>
+              <a:t/>
             </a:r>
           </a:p>
           <a:p>
@@ -25903,7 +25903,7 @@
                 </a:solidFill>
                 <a:latin typeface="PT Sans"/>
               </a:rPr>
-              <a:t>5-класс ›</a:t>
+              <a:t/>
             </a:r>
           </a:p>
           <a:p>
@@ -27359,7 +27359,7 @@
                 </a:solidFill>
                 <a:latin typeface="PT Sans"/>
               </a:rPr>
-              <a:t>5-класс ›</a:t>
+              <a:t/>
             </a:r>
           </a:p>
           <a:p>
@@ -28687,7 +28687,7 @@
                 </a:solidFill>
                 <a:latin typeface="PT Sans"/>
               </a:rPr>
-              <a:t>5-класс ›</a:t>
+              <a:t/>
             </a:r>
           </a:p>
           <a:p>
@@ -29487,7 +29487,7 @@
                 </a:solidFill>
                 <a:latin typeface="PT Sans"/>
               </a:rPr>
-              <a:t>5-класс ›</a:t>
+              <a:t/>
             </a:r>
           </a:p>
           <a:p>
@@ -30328,7 +30328,7 @@
                 </a:solidFill>
                 <a:latin typeface="PT Sans"/>
               </a:rPr>
-              <a:t>5-класс ›</a:t>
+              <a:t/>
             </a:r>
           </a:p>
           <a:p>
@@ -31277,7 +31277,7 @@
                 </a:solidFill>
                 <a:latin typeface="PT Sans"/>
               </a:rPr>
-              <a:t>5-класс ›</a:t>
+              <a:t/>
             </a:r>
           </a:p>
           <a:p>
@@ -32731,7 +32731,7 @@
                 </a:solidFill>
                 <a:latin typeface="PT Sans"/>
               </a:rPr>
-              <a:t>5-класс ›</a:t>
+              <a:t/>
             </a:r>
           </a:p>
           <a:p>
@@ -33477,7 +33477,7 @@
                 </a:solidFill>
                 <a:latin typeface="PT Sans"/>
               </a:rPr>
-              <a:t>5-класс ›</a:t>
+              <a:t/>
             </a:r>
           </a:p>
           <a:p>
@@ -34285,7 +34285,7 @@
                 </a:solidFill>
                 <a:latin typeface="PT Sans"/>
               </a:rPr>
-              <a:t>5-класс ›</a:t>
+              <a:t/>
             </a:r>
           </a:p>
           <a:p>
@@ -35476,7 +35476,7 @@
                 </a:solidFill>
                 <a:latin typeface="PT Sans"/>
               </a:rPr>
-              <a:t>5-класс ›</a:t>
+              <a:t/>
             </a:r>
           </a:p>
           <a:p>
@@ -36671,7 +36671,7 @@
                 </a:solidFill>
                 <a:latin typeface="PT Sans"/>
               </a:rPr>
-              <a:t>5-класс ›</a:t>
+              <a:t/>
             </a:r>
           </a:p>
           <a:p>
@@ -36852,7 +36852,7 @@
                 </a:solidFill>
                 <a:latin typeface="PT Sans"/>
               </a:rPr>
-              <a:t>4-класс</a:t>
+              <a:t/>
             </a:r>
           </a:p>
         </p:txBody>
@@ -37032,7 +37032,7 @@
                 </a:solidFill>
                 <a:latin typeface="PT Sans"/>
               </a:rPr>
-              <a:t>5-класс</a:t>
+              <a:t/>
             </a:r>
           </a:p>
         </p:txBody>
@@ -37212,7 +37212,7 @@
                 </a:solidFill>
                 <a:latin typeface="PT Sans"/>
               </a:rPr>
-              <a:t>5-класс</a:t>
+              <a:t/>
             </a:r>
           </a:p>
         </p:txBody>
@@ -37448,7 +37448,7 @@
                 </a:solidFill>
                 <a:latin typeface="PT Sans"/>
               </a:rPr>
-              <a:t>6-класс</a:t>
+              <a:t/>
             </a:r>
           </a:p>
         </p:txBody>
@@ -37868,7 +37868,7 @@
                 </a:solidFill>
                 <a:latin typeface="PT Sans"/>
               </a:rPr>
-              <a:t>5-класс ›</a:t>
+              <a:t/>
             </a:r>
           </a:p>
           <a:p>
@@ -39016,7 +39016,7 @@
                 </a:solidFill>
                 <a:latin typeface="PT Sans"/>
               </a:rPr>
-              <a:t>5-класс ›</a:t>
+              <a:t/>
             </a:r>
           </a:p>
           <a:p>

--- a/apps/resources/bundled_files/5-klass-butun-sandar-kobeytuu-boluu-sabak.pptx
+++ b/apps/resources/bundled_files/5-klass-butun-sandar-kobeytuu-boluu-sabak.pptx
@@ -1582,7 +1582,7 @@
           <a:lstStyle/>
           <a:p>
             <a:r>
-              <a:t>Ой жүгүртүү маданияты (Wenxi Lee, 2.6).</a:t>
+              <a:t>Ой жүгүртүү маданияты (Wenxi Lee, 2,6).</a:t>
             </a:r>
           </a:p>
         </p:txBody>
